--- a/Business_Analytics_Presentation.pptx
+++ b/Business_Analytics_Presentation.pptx
@@ -1759,7 +1759,7 @@
           <a:p>
             <a:fld id="{5BCAD085-E8A6-8845-BD4E-CB4CCA059FC4}" type="datetimeFigureOut">
               <a:rPr lang="en-US" smtClean="0"/>
-              <a:t>4/25/26</a:t>
+              <a:t>5/31/26</a:t>
             </a:fld>
             <a:endParaRPr lang="en-US"/>
           </a:p>
@@ -1927,7 +1927,7 @@
           <a:p>
             <a:fld id="{5BCAD085-E8A6-8845-BD4E-CB4CCA059FC4}" type="datetimeFigureOut">
               <a:rPr lang="en-US" smtClean="0"/>
-              <a:t>4/25/26</a:t>
+              <a:t>5/31/26</a:t>
             </a:fld>
             <a:endParaRPr lang="en-US"/>
           </a:p>
@@ -2105,7 +2105,7 @@
           <a:p>
             <a:fld id="{5BCAD085-E8A6-8845-BD4E-CB4CCA059FC4}" type="datetimeFigureOut">
               <a:rPr lang="en-US" smtClean="0"/>
-              <a:t>4/25/26</a:t>
+              <a:t>5/31/26</a:t>
             </a:fld>
             <a:endParaRPr lang="en-US"/>
           </a:p>
@@ -2273,7 +2273,7 @@
           <a:p>
             <a:fld id="{5BCAD085-E8A6-8845-BD4E-CB4CCA059FC4}" type="datetimeFigureOut">
               <a:rPr lang="en-US" smtClean="0"/>
-              <a:t>4/25/26</a:t>
+              <a:t>5/31/26</a:t>
             </a:fld>
             <a:endParaRPr lang="en-US"/>
           </a:p>
@@ -2518,7 +2518,7 @@
           <a:p>
             <a:fld id="{5BCAD085-E8A6-8845-BD4E-CB4CCA059FC4}" type="datetimeFigureOut">
               <a:rPr lang="en-US" smtClean="0"/>
-              <a:t>4/25/26</a:t>
+              <a:t>5/31/26</a:t>
             </a:fld>
             <a:endParaRPr lang="en-US"/>
           </a:p>
@@ -2803,7 +2803,7 @@
           <a:p>
             <a:fld id="{5BCAD085-E8A6-8845-BD4E-CB4CCA059FC4}" type="datetimeFigureOut">
               <a:rPr lang="en-US" smtClean="0"/>
-              <a:t>4/25/26</a:t>
+              <a:t>5/31/26</a:t>
             </a:fld>
             <a:endParaRPr lang="en-US"/>
           </a:p>
@@ -3222,7 +3222,7 @@
           <a:p>
             <a:fld id="{5BCAD085-E8A6-8845-BD4E-CB4CCA059FC4}" type="datetimeFigureOut">
               <a:rPr lang="en-US" smtClean="0"/>
-              <a:t>4/25/26</a:t>
+              <a:t>5/31/26</a:t>
             </a:fld>
             <a:endParaRPr lang="en-US"/>
           </a:p>
@@ -3339,7 +3339,7 @@
           <a:p>
             <a:fld id="{5BCAD085-E8A6-8845-BD4E-CB4CCA059FC4}" type="datetimeFigureOut">
               <a:rPr lang="en-US" smtClean="0"/>
-              <a:t>4/25/26</a:t>
+              <a:t>5/31/26</a:t>
             </a:fld>
             <a:endParaRPr lang="en-US"/>
           </a:p>
@@ -3434,7 +3434,7 @@
           <a:p>
             <a:fld id="{5BCAD085-E8A6-8845-BD4E-CB4CCA059FC4}" type="datetimeFigureOut">
               <a:rPr lang="en-US" smtClean="0"/>
-              <a:t>4/25/26</a:t>
+              <a:t>5/31/26</a:t>
             </a:fld>
             <a:endParaRPr lang="en-US"/>
           </a:p>
@@ -3709,7 +3709,7 @@
           <a:p>
             <a:fld id="{5BCAD085-E8A6-8845-BD4E-CB4CCA059FC4}" type="datetimeFigureOut">
               <a:rPr lang="en-US" smtClean="0"/>
-              <a:t>4/25/26</a:t>
+              <a:t>5/31/26</a:t>
             </a:fld>
             <a:endParaRPr lang="en-US"/>
           </a:p>
@@ -3961,7 +3961,7 @@
           <a:p>
             <a:fld id="{5BCAD085-E8A6-8845-BD4E-CB4CCA059FC4}" type="datetimeFigureOut">
               <a:rPr lang="en-US" smtClean="0"/>
-              <a:t>4/25/26</a:t>
+              <a:t>5/31/26</a:t>
             </a:fld>
             <a:endParaRPr lang="en-US"/>
           </a:p>
@@ -4172,7 +4172,7 @@
           <a:p>
             <a:fld id="{5BCAD085-E8A6-8845-BD4E-CB4CCA059FC4}" type="datetimeFigureOut">
               <a:rPr lang="en-US" smtClean="0"/>
-              <a:t>4/25/26</a:t>
+              <a:t>5/31/26</a:t>
             </a:fld>
             <a:endParaRPr lang="en-US"/>
           </a:p>
@@ -5225,7 +5225,7 @@
         <p:spPr>
           <a:xfrm>
             <a:off x="320040" y="4206240"/>
-            <a:ext cx="2286000" cy="292608"/>
+            <a:ext cx="2286000" cy="253916"/>
           </a:xfrm>
           <a:prstGeom prst="rect">
             <a:avLst/>
@@ -5240,27 +5240,27 @@
           <a:p>
             <a:pPr algn="l"/>
             <a:r>
-              <a:rPr sz="1050" b="0" i="0">
+              <a:rPr sz="1050" b="0" i="0" dirty="0">
                 <a:solidFill>
                   <a:srgbClr val="FFFFFF"/>
                 </a:solidFill>
                 <a:latin typeface="Calibri"/>
               </a:rPr>
-              <a:t>  Sanjhal Jain</a:t>
-            </a:r>
-          </a:p>
-        </p:txBody>
-      </p:sp>
-      <p:sp>
-        <p:nvSpPr>
-          <p:cNvPr id="19" name="TextBox 18"/>
+              <a:t> </a:t>
+            </a:r>
+          </a:p>
+        </p:txBody>
+      </p:sp>
+      <p:sp>
+        <p:nvSpPr>
+          <p:cNvPr id="20" name="TextBox 19"/>
           <p:cNvSpPr txBox="1"/>
           <p:nvPr/>
         </p:nvSpPr>
         <p:spPr>
           <a:xfrm>
-            <a:off x="2514600" y="4206240"/>
-            <a:ext cx="1371600" cy="292608"/>
+            <a:off x="320040" y="4544568"/>
+            <a:ext cx="2899678" cy="338554"/>
           </a:xfrm>
           <a:prstGeom prst="rect">
             <a:avLst/>
@@ -5273,44 +5273,9 @@
           </a:bodyPr>
           <a:lstStyle/>
           <a:p>
-            <a:pPr algn="r"/>
-            <a:r>
-              <a:rPr sz="1050" b="0" i="0">
-                <a:solidFill>
-                  <a:srgbClr val="F58520"/>
-                </a:solidFill>
-                <a:latin typeface="Calibri"/>
-              </a:rPr>
-              <a:t>2502140108</a:t>
-            </a:r>
-          </a:p>
-        </p:txBody>
-      </p:sp>
-      <p:sp>
-        <p:nvSpPr>
-          <p:cNvPr id="20" name="TextBox 19"/>
-          <p:cNvSpPr txBox="1"/>
-          <p:nvPr/>
-        </p:nvSpPr>
-        <p:spPr>
-          <a:xfrm>
-            <a:off x="320040" y="4544568"/>
-            <a:ext cx="2286000" cy="292608"/>
-          </a:xfrm>
-          <a:prstGeom prst="rect">
-            <a:avLst/>
-          </a:prstGeom>
-          <a:noFill/>
-        </p:spPr>
-        <p:txBody>
-          <a:bodyPr wrap="square">
-            <a:spAutoFit/>
-          </a:bodyPr>
-          <a:lstStyle/>
-          <a:p>
             <a:pPr algn="l"/>
             <a:r>
-              <a:rPr sz="1050" b="0" i="0">
+              <a:rPr sz="1600" b="0" i="0" dirty="0">
                 <a:solidFill>
                   <a:srgbClr val="FFFFFF"/>
                 </a:solidFill>
@@ -5323,14 +5288,14 @@
       </p:sp>
       <p:sp>
         <p:nvSpPr>
-          <p:cNvPr id="21" name="TextBox 20"/>
+          <p:cNvPr id="22" name="TextBox 21"/>
           <p:cNvSpPr txBox="1"/>
           <p:nvPr/>
         </p:nvSpPr>
         <p:spPr>
           <a:xfrm>
-            <a:off x="2514600" y="4544568"/>
-            <a:ext cx="1371600" cy="292608"/>
+            <a:off x="320040" y="4882896"/>
+            <a:ext cx="2286000" cy="253916"/>
           </a:xfrm>
           <a:prstGeom prst="rect">
             <a:avLst/>
@@ -5343,50 +5308,15 @@
           </a:bodyPr>
           <a:lstStyle/>
           <a:p>
-            <a:pPr algn="r"/>
-            <a:r>
-              <a:rPr sz="1050" b="0" i="0">
-                <a:solidFill>
-                  <a:srgbClr val="F58520"/>
-                </a:solidFill>
-                <a:latin typeface="Calibri"/>
-              </a:rPr>
-              <a:t>2502140110</a:t>
-            </a:r>
-          </a:p>
-        </p:txBody>
-      </p:sp>
-      <p:sp>
-        <p:nvSpPr>
-          <p:cNvPr id="22" name="TextBox 21"/>
-          <p:cNvSpPr txBox="1"/>
-          <p:nvPr/>
-        </p:nvSpPr>
-        <p:spPr>
-          <a:xfrm>
-            <a:off x="320040" y="4882896"/>
-            <a:ext cx="2286000" cy="292608"/>
-          </a:xfrm>
-          <a:prstGeom prst="rect">
-            <a:avLst/>
-          </a:prstGeom>
-          <a:noFill/>
-        </p:spPr>
-        <p:txBody>
-          <a:bodyPr wrap="square">
-            <a:spAutoFit/>
-          </a:bodyPr>
-          <a:lstStyle/>
-          <a:p>
             <a:pPr algn="l"/>
             <a:r>
-              <a:rPr sz="1050" b="0" i="0">
+              <a:rPr sz="1050" b="0" i="0" dirty="0">
                 <a:solidFill>
                   <a:srgbClr val="FFFFFF"/>
                 </a:solidFill>
                 <a:latin typeface="Calibri"/>
               </a:rPr>
-              <a:t>  Avni Bhambani</a:t>
+              <a:t> </a:t>
             </a:r>
           </a:p>
         </p:txBody>
@@ -5400,7 +5330,7 @@
         <p:spPr>
           <a:xfrm>
             <a:off x="2514600" y="4882896"/>
-            <a:ext cx="1371600" cy="292608"/>
+            <a:ext cx="1371600" cy="253916"/>
           </a:xfrm>
           <a:prstGeom prst="rect">
             <a:avLst/>
@@ -5414,15 +5344,12 @@
           <a:lstStyle/>
           <a:p>
             <a:pPr algn="r"/>
-            <a:r>
-              <a:rPr sz="1050" b="0" i="0">
-                <a:solidFill>
-                  <a:srgbClr val="F58520"/>
-                </a:solidFill>
-                <a:latin typeface="Calibri"/>
-              </a:rPr>
-              <a:t>2502140017</a:t>
-            </a:r>
+            <a:endParaRPr sz="1050" b="0" i="0" dirty="0">
+              <a:solidFill>
+                <a:srgbClr val="F58520"/>
+              </a:solidFill>
+              <a:latin typeface="Calibri"/>
+            </a:endParaRPr>
           </a:p>
         </p:txBody>
       </p:sp>
